--- a/GitGitHub slides.pptx
+++ b/GitGitHub slides.pptx
@@ -163,8 +163,7 @@
 <file path=ppt/revisionInfo.xml><?xml version="1.0" encoding="utf-8"?>
 <p1510:revInfo xmlns:a="http://schemas.openxmlformats.org/drawingml/2006/main" xmlns:r="http://schemas.openxmlformats.org/officeDocument/2006/relationships" xmlns:p1510="http://schemas.microsoft.com/office/powerpoint/2015/10/main">
   <p1510:revLst>
-    <p1510:client id="{3A04633B-CCCC-4400-85E8-764016DABC13}" v="1859" dt="2026-03-01T11:49:06.117"/>
-    <p1510:client id="{BD4382D7-C5BC-B748-8F4E-B0F21D2F0593}" v="54" dt="2026-03-02T10:43:19.335"/>
+    <p1510:client id="{BD4382D7-C5BC-B748-8F4E-B0F21D2F0593}" v="56" dt="2026-03-02T16:27:28.428"/>
     <p1510:client id="{DBAA9207-F36A-49AD-803E-34AF69B3DED4}" v="7" dt="2026-03-01T18:05:47.123"/>
   </p1510:revLst>
 </p1510:revInfo>
@@ -2134,7 +2133,7 @@
   <pc:docChgLst>
     <pc:chgData name="Ison, Graham" userId="ac16118c-999a-4a17-b03f-82145771d116" providerId="ADAL" clId="{3815F268-C05A-5E0B-B22A-991A8360F93E}"/>
     <pc:docChg chg="undo redo custSel addSld delSld modSld sldOrd">
-      <pc:chgData name="Ison, Graham" userId="ac16118c-999a-4a17-b03f-82145771d116" providerId="ADAL" clId="{3815F268-C05A-5E0B-B22A-991A8360F93E}" dt="2026-03-02T10:44:47.662" v="565" actId="2696"/>
+      <pc:chgData name="Ison, Graham" userId="ac16118c-999a-4a17-b03f-82145771d116" providerId="ADAL" clId="{3815F268-C05A-5E0B-B22A-991A8360F93E}" dt="2026-03-02T16:30:45.837" v="593" actId="20577"/>
       <pc:docMkLst>
         <pc:docMk/>
       </pc:docMkLst>
@@ -2195,6 +2194,21 @@
             <pc:docMk/>
             <pc:sldMk cId="3439733533" sldId="322"/>
             <ac:spMk id="6" creationId="{FC767B2D-71ED-8241-FEFA-0E1BEBDC86BA}"/>
+          </ac:spMkLst>
+        </pc:spChg>
+      </pc:sldChg>
+      <pc:sldChg chg="modSp mod">
+        <pc:chgData name="Ison, Graham" userId="ac16118c-999a-4a17-b03f-82145771d116" providerId="ADAL" clId="{3815F268-C05A-5E0B-B22A-991A8360F93E}" dt="2026-03-02T16:30:45.837" v="593" actId="20577"/>
+        <pc:sldMkLst>
+          <pc:docMk/>
+          <pc:sldMk cId="2810443703" sldId="326"/>
+        </pc:sldMkLst>
+        <pc:spChg chg="mod">
+          <ac:chgData name="Ison, Graham" userId="ac16118c-999a-4a17-b03f-82145771d116" providerId="ADAL" clId="{3815F268-C05A-5E0B-B22A-991A8360F93E}" dt="2026-03-02T16:30:45.837" v="593" actId="20577"/>
+          <ac:spMkLst>
+            <pc:docMk/>
+            <pc:sldMk cId="2810443703" sldId="326"/>
+            <ac:spMk id="5" creationId="{C1BA7A40-782F-4A2A-9328-ADC0DAF9EB35}"/>
           </ac:spMkLst>
         </pc:spChg>
       </pc:sldChg>
@@ -23771,7 +23785,7 @@
         <p:spPr>
           <a:xfrm>
             <a:off x="1041653" y="1614755"/>
-            <a:ext cx="7915275" cy="2129814"/>
+            <a:ext cx="7915275" cy="4216539"/>
           </a:xfrm>
           <a:prstGeom prst="rect">
             <a:avLst/>
@@ -23784,56 +23798,9 @@
           </a:bodyPr>
           <a:lstStyle/>
           <a:p>
-            <a:pPr>
-              <a:lnSpc>
-                <a:spcPct val="107000"/>
-              </a:lnSpc>
-              <a:spcAft>
-                <a:spcPts val="800"/>
-              </a:spcAft>
-            </a:pPr>
-            <a:r>
-              <a:rPr lang="en-GB" sz="2800" dirty="0">
-                <a:effectLst/>
-                <a:latin typeface="Calibri" panose="020F0502020204030204" pitchFamily="34" charset="0"/>
-                <a:ea typeface="Calibri" panose="020F0502020204030204" pitchFamily="34" charset="0"/>
-                <a:cs typeface="Arial" panose="020B0604020202020204" pitchFamily="34" charset="0"/>
-              </a:rPr>
-              <a:t>Terminal</a:t>
-            </a:r>
-          </a:p>
-          <a:p>
-            <a:pPr>
-              <a:lnSpc>
-                <a:spcPct val="107000"/>
-              </a:lnSpc>
-              <a:spcAft>
-                <a:spcPts val="800"/>
-              </a:spcAft>
-            </a:pPr>
-            <a:r>
-              <a:rPr lang="en-GB" sz="1800" dirty="0">
-                <a:solidFill>
-                  <a:srgbClr val="000000"/>
-                </a:solidFill>
-                <a:effectLst/>
-                <a:latin typeface="Consolas" panose="020B0609020204030204" pitchFamily="49" charset="0"/>
-                <a:ea typeface="Calibri" panose="020F0502020204030204" pitchFamily="34" charset="0"/>
-                <a:cs typeface="Arial" panose="020B0604020202020204" pitchFamily="34" charset="0"/>
-              </a:rPr>
-              <a:t> </a:t>
-            </a:r>
-            <a:endParaRPr lang="en-GB" sz="1800" dirty="0">
-              <a:effectLst/>
-              <a:latin typeface="Calibri" panose="020F0502020204030204" pitchFamily="34" charset="0"/>
-              <a:ea typeface="Calibri" panose="020F0502020204030204" pitchFamily="34" charset="0"/>
-              <a:cs typeface="Arial" panose="020B0604020202020204" pitchFamily="34" charset="0"/>
-            </a:endParaRPr>
-          </a:p>
-          <a:p>
             <a:pPr marL="285750" indent="-285750">
               <a:lnSpc>
-                <a:spcPct val="107000"/>
+                <a:spcPct val="150000"/>
               </a:lnSpc>
               <a:spcAft>
                 <a:spcPts val="800"/>
@@ -23842,15 +23809,15 @@
               <a:buChar char="•"/>
             </a:pPr>
             <a:r>
-              <a:rPr lang="en-GB" sz="1800" dirty="0">
+              <a:rPr lang="en-GB" sz="2000" dirty="0">
                 <a:effectLst/>
                 <a:latin typeface="Calibri" panose="020F0502020204030204" pitchFamily="34" charset="0"/>
                 <a:ea typeface="Calibri" panose="020F0502020204030204" pitchFamily="34" charset="0"/>
                 <a:cs typeface="Arial" panose="020B0604020202020204" pitchFamily="34" charset="0"/>
               </a:rPr>
-              <a:t>To temporarily store your work without making a commit </a:t>
-            </a:r>
-            <a:endParaRPr lang="en-GB" dirty="0">
+              <a:t>To temporarily store your work without making a commit:</a:t>
+            </a:r>
+            <a:endParaRPr lang="en-GB" sz="2000" dirty="0">
               <a:latin typeface="Calibri" panose="020F0502020204030204" pitchFamily="34" charset="0"/>
               <a:ea typeface="Calibri" panose="020F0502020204030204" pitchFamily="34" charset="0"/>
               <a:cs typeface="Arial" panose="020B0604020202020204" pitchFamily="34" charset="0"/>
@@ -23859,14 +23826,14 @@
           <a:p>
             <a:pPr>
               <a:lnSpc>
-                <a:spcPct val="107000"/>
+                <a:spcPct val="150000"/>
               </a:lnSpc>
               <a:spcAft>
                 <a:spcPts val="800"/>
               </a:spcAft>
             </a:pPr>
             <a:r>
-              <a:rPr lang="en-GB" sz="1800" dirty="0">
+              <a:rPr lang="en-GB" sz="2000" dirty="0">
                 <a:effectLst/>
                 <a:latin typeface="Calibri" panose="020F0502020204030204" pitchFamily="34" charset="0"/>
                 <a:ea typeface="Calibri" panose="020F0502020204030204" pitchFamily="34" charset="0"/>
@@ -23875,7 +23842,7 @@
               <a:t>	</a:t>
             </a:r>
             <a:r>
-              <a:rPr lang="en-GB" sz="1800" dirty="0">
+              <a:rPr lang="en-GB" sz="2000" dirty="0">
                 <a:solidFill>
                   <a:srgbClr val="000000"/>
                 </a:solidFill>
@@ -23887,7 +23854,7 @@
               <a:t>git </a:t>
             </a:r>
             <a:r>
-              <a:rPr lang="en-GB" dirty="0">
+              <a:rPr lang="en-GB" sz="2000" dirty="0">
                 <a:solidFill>
                   <a:srgbClr val="000000"/>
                 </a:solidFill>
@@ -23897,19 +23864,91 @@
               </a:rPr>
               <a:t>stash</a:t>
             </a:r>
-            <a:r>
-              <a:rPr lang="en-GB" sz="1800" dirty="0">
-                <a:solidFill>
-                  <a:srgbClr val="000000"/>
-                </a:solidFill>
-                <a:effectLst/>
+          </a:p>
+          <a:p>
+            <a:pPr marL="285750" indent="-285750">
+              <a:lnSpc>
+                <a:spcPct val="150000"/>
+              </a:lnSpc>
+              <a:spcAft>
+                <a:spcPts val="800"/>
+              </a:spcAft>
+              <a:buFont typeface="Arial" panose="020B0604020202020204" pitchFamily="34" charset="0"/>
+              <a:buChar char="•"/>
+            </a:pPr>
+            <a:r>
+              <a:rPr lang="en-GB" sz="2000" dirty="0"/>
+              <a:t>Useful if you need to switch branches but aren’t ready to commit yet.</a:t>
+            </a:r>
+          </a:p>
+          <a:p>
+            <a:pPr marL="285750" indent="-285750">
+              <a:lnSpc>
+                <a:spcPct val="150000"/>
+              </a:lnSpc>
+              <a:spcAft>
+                <a:spcPts val="800"/>
+              </a:spcAft>
+              <a:buFont typeface="Arial" panose="020B0604020202020204" pitchFamily="34" charset="0"/>
+              <a:buChar char="•"/>
+            </a:pPr>
+            <a:r>
+              <a:rPr lang="en-GB" sz="2000" dirty="0"/>
+              <a:t>To re-apply the stashed changes:</a:t>
+            </a:r>
+          </a:p>
+          <a:p>
+            <a:pPr>
+              <a:lnSpc>
+                <a:spcPct val="150000"/>
+              </a:lnSpc>
+              <a:spcAft>
+                <a:spcPts val="800"/>
+              </a:spcAft>
+            </a:pPr>
+            <a:r>
+              <a:rPr lang="en-GB" sz="2000" dirty="0"/>
+              <a:t>	</a:t>
+            </a:r>
+            <a:r>
+              <a:rPr lang="en-GB" sz="2000" dirty="0">
                 <a:latin typeface="Consolas" panose="020B0609020204030204" pitchFamily="49" charset="0"/>
-                <a:ea typeface="Calibri" panose="020F0502020204030204" pitchFamily="34" charset="0"/>
-                <a:cs typeface="Arial" panose="020B0604020202020204" pitchFamily="34" charset="0"/>
+                <a:cs typeface="Consolas" panose="020B0609020204030204" pitchFamily="49" charset="0"/>
               </a:rPr>
+              <a:t>git stash apply</a:t>
+            </a:r>
+            <a:r>
+              <a:rPr lang="en-GB" sz="2000" dirty="0"/>
               <a:t> </a:t>
             </a:r>
-            <a:endParaRPr lang="en-GB" sz="1800" dirty="0">
+          </a:p>
+          <a:p>
+            <a:pPr marL="285750" indent="-285750">
+              <a:lnSpc>
+                <a:spcPct val="150000"/>
+              </a:lnSpc>
+              <a:spcAft>
+                <a:spcPts val="800"/>
+              </a:spcAft>
+              <a:buFont typeface="Arial" panose="020B0604020202020204" pitchFamily="34" charset="0"/>
+              <a:buChar char="•"/>
+            </a:pPr>
+            <a:r>
+              <a:rPr lang="en-GB" sz="2000" dirty="0"/>
+              <a:t>(Alternatively, </a:t>
+            </a:r>
+            <a:r>
+              <a:rPr lang="en-GB" sz="2000" dirty="0">
+                <a:latin typeface="Consolas" panose="020B0609020204030204" pitchFamily="49" charset="0"/>
+                <a:cs typeface="Consolas" panose="020B0609020204030204" pitchFamily="49" charset="0"/>
+              </a:rPr>
+              <a:t>git stash pop</a:t>
+            </a:r>
+            <a:r>
+              <a:rPr lang="en-GB" sz="2000" dirty="0"/>
+              <a:t> is like apply but also removes the stash entry.)  </a:t>
+            </a:r>
+            <a:endParaRPr lang="en-GB" sz="2000" dirty="0">
               <a:effectLst/>
               <a:latin typeface="Calibri" panose="020F0502020204030204" pitchFamily="34" charset="0"/>
               <a:ea typeface="Calibri" panose="020F0502020204030204" pitchFamily="34" charset="0"/>
